--- a/ml/plans/E080_hourglass_two_scales.pptx
+++ b/ml/plans/E080_hourglass_two_scales.pptx
@@ -994,7 +994,7 @@
       </p:sp>
       <p:pic>
         <p:nvPicPr>
-          <p:cNvPr id="6" name="Image 0" descr="/home/claude/earth/ml/plans/E080_figures/two_scales.png">    </p:cNvPr>
+          <p:cNvPr id="6" name="Image 0" descr="/home/claude/earth/ml/plans/E080_figures/two_scales_3d.png">    </p:cNvPr>
           <p:cNvPicPr>
             <a:picLocks noChangeAspect="1"/>
           </p:cNvPicPr>
@@ -1008,8 +1008,8 @@
         </p:blipFill>
         <p:spPr>
           <a:xfrm>
-            <a:off x="713232" y="1335024"/>
-            <a:ext cx="10771632" cy="4499617"/>
+            <a:off x="956920" y="1316736"/>
+            <a:ext cx="10277856" cy="4484817"/>
           </a:xfrm>
           <a:prstGeom prst="rect">
             <a:avLst/>
